--- a/Topic_E/Exam_Practice/TE-L10_Writing_Workshop_International_Life_and_Global_Connections.pptx
+++ b/Topic_E/Exam_Practice/TE-L10_Writing_Workshop_International_Life_and_Global_Connections.pptx
@@ -784,7 +784,11 @@
           <a:lstStyle/>
           <a:p>
             <a:r>
-              <a:rPr lang="en-US" dirty="0"/>
+              <a:rPr lang="ar-SA" dirty="0">
+                <a:latin typeface="Amiri" pitchFamily="2" charset="-78"/>
+                <a:ea typeface="Amiri" pitchFamily="2" charset="-78"/>
+                <a:cs typeface="Amiri" pitchFamily="2" charset="-78"/>
+              </a:rPr>
               <a:t>Q3 (3 min to choose and read). Title (أ) suits Core and Develop; title (ب) suits Stretch.</a:t>
             </a:r>
             <a:endParaRPr lang="en-US" dirty="0"/>
@@ -1403,7 +1407,11 @@
           <a:lstStyle/>
           <a:p>
             <a:r>
-              <a:rPr lang="en-US" dirty="0"/>
+              <a:rPr lang="ar-SA" dirty="0">
+                <a:latin typeface="Amiri" pitchFamily="2" charset="-78"/>
+                <a:ea typeface="Amiri" pitchFamily="2" charset="-78"/>
+                <a:cs typeface="Amiri" pitchFamily="2" charset="-78"/>
+              </a:rPr>
               <a:t>WELCOME (1 min) — while students join.
 • Greet each student by name as they arrive: السَّلَامُ عَلَيْكُمْ. Take the register (Pastoral Tracker: attendance 0/1).
 • 2-MINUTE CHECK-IN (SEND training): a private chat to any student who seemed unsettled last lesson — “Are you okay today? 👍 / 👎”.
@@ -1672,7 +1680,11 @@
           <a:lstStyle/>
           <a:p>
             <a:r>
-              <a:rPr lang="en-US" dirty="0"/>
+              <a:rPr lang="ar-SA" dirty="0">
+                <a:latin typeface="Amiri" pitchFamily="2" charset="-78"/>
+                <a:ea typeface="Amiri" pitchFamily="2" charset="-78"/>
+                <a:cs typeface="Amiri" pitchFamily="2" charset="-78"/>
+              </a:rPr>
               <a:t>QUESTION 1 — FORM FILLING. About 8 minutes. Core: boxes 1–6. Develop / Stretch: all 8. Box 3 heading: a relative clause with a returning pronoun (tumaththilīnahu — a boy reads تُمَثِّلُهُ). Box 8 combines a passive (duʿima) with a conditional.</a:t>
             </a:r>
             <a:endParaRPr lang="en-US" dirty="0"/>
@@ -1936,7 +1948,11 @@
           <a:lstStyle/>
           <a:p>
             <a:r>
-              <a:rPr lang="en-US" dirty="0"/>
+              <a:rPr lang="ar-SA" dirty="0">
+                <a:latin typeface="Amiri" pitchFamily="2" charset="-78"/>
+                <a:ea typeface="Amiri" pitchFamily="2" charset="-78"/>
+                <a:cs typeface="Amiri" pitchFamily="2" charset="-78"/>
+              </a:rPr>
               <a:t>Question words: مَنْ شَارَكَ (who took part) · مَثَّلْتِ (you represented — PAST) · نُوقِشَ / قُرِّرَ (was discussed / decided — PASSIVE) · خِطَطُكِ (plans → إِذَا … فَسَأُشَارِكُ).</a:t>
             </a:r>
             <a:endParaRPr lang="en-US" dirty="0"/>
@@ -2508,6 +2524,7 @@
                   <a:srgbClr val="D4AF37"/>
                 </a:solidFill>
                 <a:latin typeface="Amiri" pitchFamily="2" charset="-78"/>
+                <a:ea typeface="Amiri" pitchFamily="2" charset="-78"/>
                 <a:cs typeface="Amiri" pitchFamily="2" charset="-78"/>
               </a:rPr>
               <a:t>م</a:t>
@@ -2714,6 +2731,7 @@
                   <a:srgbClr val="D4AF37"/>
                 </a:solidFill>
                 <a:latin typeface="Amiri" pitchFamily="2" charset="-78"/>
+                <a:ea typeface="Amiri" pitchFamily="2" charset="-78"/>
                 <a:cs typeface="Amiri" pitchFamily="2" charset="-78"/>
               </a:rPr>
               <a:t>وَرْشَةُ الكِتَابَةِ — الحَيَاةُ الدُّوَلِيَّةُ وَالرَّوَابِطُ العَالَمِيَّةُ</a:t>
@@ -3171,6 +3189,7 @@
                   <a:srgbClr val="D4AF37"/>
                 </a:solidFill>
                 <a:latin typeface="Amiri" pitchFamily="2" charset="-78"/>
+                <a:ea typeface="Amiri" pitchFamily="2" charset="-78"/>
                 <a:cs typeface="Amiri" pitchFamily="2" charset="-78"/>
               </a:rPr>
               <a:t>م</a:t>
@@ -3491,6 +3510,7 @@
                   <a:srgbClr val="8A6D1E"/>
                 </a:solidFill>
                 <a:latin typeface="Amiri" pitchFamily="2" charset="-78"/>
+                <a:ea typeface="Amiri" pitchFamily="2" charset="-78"/>
                 <a:cs typeface="Amiri" pitchFamily="2" charset="-78"/>
               </a:rPr>
               <a:t>نَمُوذَجُ الإِجَابَةِ</a:t>
@@ -3604,6 +3624,7 @@
                   <a:srgbClr val="1F2A37"/>
                 </a:solidFill>
                 <a:latin typeface="Amiri" pitchFamily="2" charset="-78"/>
+                <a:ea typeface="Amiri" pitchFamily="2" charset="-78"/>
                 <a:cs typeface="Amiri" pitchFamily="2" charset="-78"/>
               </a:rPr>
               <a:t>مَرْحَبًا يَا دِينَا،</a:t>
@@ -3623,6 +3644,7 @@
                   <a:srgbClr val="1F2A37"/>
                 </a:solidFill>
                 <a:latin typeface="Amiri" pitchFamily="2" charset="-78"/>
+                <a:ea typeface="Amiri" pitchFamily="2" charset="-78"/>
                 <a:cs typeface="Amiri" pitchFamily="2" charset="-78"/>
               </a:rPr>
               <a:t>كَيْفَ حَالُكِ؟ عُدْتُ أَمْسِ مِنْ مُؤْتَمَرِ نَمُوذَجِ الأُمَمِ المُتَّحِدَةِ فِي لَنْدَنَ! كَانَ فِيهِ طُلَّابٌ مِنْ عِشْرِينَ مَدْرَسَةً. أَنَا مَثَّلْتُ المَغْرِبَ، وَتَكَلَّمْتُ عَنْ تَغَيُّرِ المُنَاخِ. فِي المُؤْتَمَرِ نُوقِشَتْ قَضَايَا كَثِيرَةٌ، مِثْلَ الفَقْرِ وَالمِيَاهِ النَّظِيفَةِ. فِي اليَوْمِ الأَخِيرِ قُبِلَ اقْتِرَاحِي، فَكُنْتُ سَعِيدَةً جِدًّا! أَظُنُّ أَنَّ المُؤْتَمَرَ مُفِيدٌ، لِأَنَّنَا نَتَعَلَّمُ عَنِ العَالَمِ وَنَتَكَلَّمُ أَمَامَ النَّاسِ. إِذَا نَجَحْتُ فِي الاخْتِيَارِ، فَسَأُشَارِكُ فِي مُؤْتَمَرٍ دُوَلِيٍّ فِي جِنِيفَ. وَأَنْتِ، هَلْ تُحِبِّينَ أَنْ تَنْضَمِّي إِلَى النَّادِي؟</a:t>
@@ -3642,6 +3664,7 @@
                   <a:srgbClr val="1F2A37"/>
                 </a:solidFill>
                 <a:latin typeface="Amiri" pitchFamily="2" charset="-78"/>
+                <a:ea typeface="Amiri" pitchFamily="2" charset="-78"/>
                 <a:cs typeface="Amiri" pitchFamily="2" charset="-78"/>
               </a:rPr>
               <a:t>مَعَ السَّلَامَةِ،</a:t>
@@ -3661,6 +3684,7 @@
                   <a:srgbClr val="1F2A37"/>
                 </a:solidFill>
                 <a:latin typeface="Amiri" pitchFamily="2" charset="-78"/>
+                <a:ea typeface="Amiri" pitchFamily="2" charset="-78"/>
                 <a:cs typeface="Amiri" pitchFamily="2" charset="-78"/>
               </a:rPr>
               <a:t>هِبَةُ</a:t>
@@ -3824,11 +3848,12 @@
               <a:buNone/>
             </a:pPr>
             <a:r>
-              <a:rPr lang="en-US" sz="950" b="1" dirty="0">
+              <a:rPr lang="ar-SA" sz="950" b="1" dirty="0">
                 <a:solidFill>
                   <a:srgbClr val="FFFFFF"/>
                 </a:solidFill>
                 <a:latin typeface="Calibri" pitchFamily="34" charset="0"/>
+                <a:ea typeface="Amiri" pitchFamily="2" charset="-78"/>
                 <a:cs typeface="Amiri" pitchFamily="2" charset="-78"/>
               </a:rPr>
               <a:t>مَثَّلْتُ المَغْرِبَ</a:t>
@@ -3889,11 +3914,12 @@
               <a:buNone/>
             </a:pPr>
             <a:r>
-              <a:rPr lang="en-US" sz="950" b="1" dirty="0">
+              <a:rPr lang="ar-SA" sz="950" b="1" dirty="0">
                 <a:solidFill>
                   <a:srgbClr val="FFFFFF"/>
                 </a:solidFill>
                 <a:latin typeface="Calibri" pitchFamily="34" charset="0"/>
+                <a:ea typeface="Amiri" pitchFamily="2" charset="-78"/>
                 <a:cs typeface="Amiri" pitchFamily="2" charset="-78"/>
               </a:rPr>
               <a:t>نُوقِشَتْ قَضَايَا</a:t>
@@ -3954,11 +3980,12 @@
               <a:buNone/>
             </a:pPr>
             <a:r>
-              <a:rPr lang="en-US" sz="950" b="1" dirty="0">
+              <a:rPr lang="ar-SA" sz="950" b="1" dirty="0">
                 <a:solidFill>
                   <a:srgbClr val="FFFFFF"/>
                 </a:solidFill>
                 <a:latin typeface="Calibri" pitchFamily="34" charset="0"/>
+                <a:ea typeface="Amiri" pitchFamily="2" charset="-78"/>
                 <a:cs typeface="Amiri" pitchFamily="2" charset="-78"/>
               </a:rPr>
               <a:t>قُبِلَ اقْتِرَاحِي</a:t>
@@ -4019,11 +4046,12 @@
               <a:buNone/>
             </a:pPr>
             <a:r>
-              <a:rPr lang="en-US" sz="950" b="1" dirty="0">
+              <a:rPr lang="ar-SA" sz="950" b="1" dirty="0">
                 <a:solidFill>
                   <a:srgbClr val="FFFFFF"/>
                 </a:solidFill>
                 <a:latin typeface="Calibri" pitchFamily="34" charset="0"/>
+                <a:ea typeface="Amiri" pitchFamily="2" charset="-78"/>
                 <a:cs typeface="Amiri" pitchFamily="2" charset="-78"/>
               </a:rPr>
               <a:t>إِذَا نَجَحْتُ … فَسَأُشَارِكُ</a:t>
@@ -4157,6 +4185,7 @@
                   <a:srgbClr val="D4AF37"/>
                 </a:solidFill>
                 <a:latin typeface="Amiri" pitchFamily="2" charset="-78"/>
+                <a:ea typeface="Amiri" pitchFamily="2" charset="-78"/>
                 <a:cs typeface="Amiri" pitchFamily="2" charset="-78"/>
               </a:rPr>
               <a:t>م</a:t>
@@ -4477,6 +4506,7 @@
                   <a:srgbClr val="8A6D1E"/>
                 </a:solidFill>
                 <a:latin typeface="Amiri" pitchFamily="2" charset="-78"/>
+                <a:ea typeface="Amiri" pitchFamily="2" charset="-78"/>
                 <a:cs typeface="Amiri" pitchFamily="2" charset="-78"/>
               </a:rPr>
               <a:t>نَمُوذَجُ الإِجَابَةِ</a:t>
@@ -4590,6 +4620,7 @@
                   <a:srgbClr val="1F2A37"/>
                 </a:solidFill>
                 <a:latin typeface="Amiri" pitchFamily="2" charset="-78"/>
+                <a:ea typeface="Amiri" pitchFamily="2" charset="-78"/>
                 <a:cs typeface="Amiri" pitchFamily="2" charset="-78"/>
               </a:rPr>
               <a:t>عَزِيزَتِي دِينَا،</a:t>
@@ -4609,6 +4640,7 @@
                   <a:srgbClr val="1F2A37"/>
                 </a:solidFill>
                 <a:latin typeface="Amiri" pitchFamily="2" charset="-78"/>
+                <a:ea typeface="Amiri" pitchFamily="2" charset="-78"/>
                 <a:cs typeface="Amiri" pitchFamily="2" charset="-78"/>
               </a:rPr>
               <a:t>مَا زِلْتُ مُتَحَمِّسَةً بَعْدَ يَوْمَيْنِ فِي مُؤْتَمَرِ نَمُوذَجِ الأُمَمِ المُتَّحِدَةِ، الَّذِي نُظِّمَ فِي لَنْدَنَ بِمُشَارَكَةِ مِئَتَيْ طَالِبٍ. كُنْتُ مَنْدُوبَةَ المَغْرِبِ فِي لَجْنَةِ البِيئَةِ، وَدَافَعْتُ عَنْ حَقِّ الدُّوَلِ الإِفْرِيقِيَّةِ فِي الحُصُولِ عَلَى دَعْمٍ لِمُوَاجَهَةِ الجَفَافِ. وَبَعْدَ نِقَاشٍ طَوِيلٍ، صُوِّتَ عَلَى اقْتِرَاحِي وَقُبِلَ بِأَغْلَبِيَّةٍ كَبِيرَةٍ! صَحِيحٌ أَنَّنِي كُنْتُ خَائِفَةً مِنَ الكَلَامِ أَمَامَ القَاعَةِ، غَيْرَ أَنَّ التَّجْرِبَةَ عَلَّمَتْنِي أَنَّ الإِقْنَاعَ يَحْتَاجُ إِلَى أَدِلَّةٍ لَا إِلَى صَوْتٍ عَالٍ. وَأَكْثَرُ مَا أَدْهَشَنِي أَنَّ طُلَّابًا مِنْ ثَقَافَاتٍ مُخْتَلِفَةٍ اسْتَطَاعُوا أَنْ يَتَّفِقُوا. وَإِذَا اخْتِرْتُ لِلْفَرِيقِ الوَطَنِيِّ، فَسَأُسَافِرُ إِلَى جِنِيفَ فِي الرَّبِيعِ. أَلَا تُرِيدِينَ أَنْ تُجَرِّبِي مَعِي؟</a:t>
@@ -4628,6 +4660,7 @@
                   <a:srgbClr val="1F2A37"/>
                 </a:solidFill>
                 <a:latin typeface="Amiri" pitchFamily="2" charset="-78"/>
+                <a:ea typeface="Amiri" pitchFamily="2" charset="-78"/>
                 <a:cs typeface="Amiri" pitchFamily="2" charset="-78"/>
               </a:rPr>
               <a:t>بِمَحَبَّةٍ،</a:t>
@@ -4647,6 +4680,7 @@
                   <a:srgbClr val="1F2A37"/>
                 </a:solidFill>
                 <a:latin typeface="Amiri" pitchFamily="2" charset="-78"/>
+                <a:ea typeface="Amiri" pitchFamily="2" charset="-78"/>
                 <a:cs typeface="Amiri" pitchFamily="2" charset="-78"/>
               </a:rPr>
               <a:t>هِبَةُ</a:t>
@@ -4810,11 +4844,12 @@
               <a:buNone/>
             </a:pPr>
             <a:r>
-              <a:rPr lang="en-US" sz="950" b="1" dirty="0">
+              <a:rPr lang="ar-SA" sz="950" b="1" dirty="0">
                 <a:solidFill>
                   <a:srgbClr val="FFFFFF"/>
                 </a:solidFill>
                 <a:latin typeface="Calibri" pitchFamily="34" charset="0"/>
+                <a:ea typeface="Amiri" pitchFamily="2" charset="-78"/>
                 <a:cs typeface="Amiri" pitchFamily="2" charset="-78"/>
               </a:rPr>
               <a:t>الَّذِي نُظِّمَ</a:t>
@@ -4875,11 +4910,12 @@
               <a:buNone/>
             </a:pPr>
             <a:r>
-              <a:rPr lang="en-US" sz="950" b="1" dirty="0">
+              <a:rPr lang="ar-SA" sz="950" b="1" dirty="0">
                 <a:solidFill>
                   <a:srgbClr val="FFFFFF"/>
                 </a:solidFill>
                 <a:latin typeface="Calibri" pitchFamily="34" charset="0"/>
+                <a:ea typeface="Amiri" pitchFamily="2" charset="-78"/>
                 <a:cs typeface="Amiri" pitchFamily="2" charset="-78"/>
               </a:rPr>
               <a:t>صُوِّتَ عَلَى اقْتِرَاحِي وَقُبِلَ</a:t>
@@ -4940,11 +4976,12 @@
               <a:buNone/>
             </a:pPr>
             <a:r>
-              <a:rPr lang="en-US" sz="950" b="1" dirty="0">
+              <a:rPr lang="ar-SA" sz="950" b="1" dirty="0">
                 <a:solidFill>
                   <a:srgbClr val="FFFFFF"/>
                 </a:solidFill>
                 <a:latin typeface="Calibri" pitchFamily="34" charset="0"/>
+                <a:ea typeface="Amiri" pitchFamily="2" charset="-78"/>
                 <a:cs typeface="Amiri" pitchFamily="2" charset="-78"/>
               </a:rPr>
               <a:t>أَدِلَّةٍ لَا إِلَى صَوْتٍ عَالٍ</a:t>
@@ -5005,11 +5042,12 @@
               <a:buNone/>
             </a:pPr>
             <a:r>
-              <a:rPr lang="en-US" sz="950" b="1" dirty="0">
+              <a:rPr lang="ar-SA" sz="950" b="1" dirty="0">
                 <a:solidFill>
                   <a:srgbClr val="FFFFFF"/>
                 </a:solidFill>
                 <a:latin typeface="Calibri" pitchFamily="34" charset="0"/>
+                <a:ea typeface="Amiri" pitchFamily="2" charset="-78"/>
                 <a:cs typeface="Amiri" pitchFamily="2" charset="-78"/>
               </a:rPr>
               <a:t>إِذَا اخْتِرْتُ … فَسَأُسَافِرُ</a:t>
@@ -5143,6 +5181,7 @@
                   <a:srgbClr val="D4AF37"/>
                 </a:solidFill>
                 <a:latin typeface="Amiri" pitchFamily="2" charset="-78"/>
+                <a:ea typeface="Amiri" pitchFamily="2" charset="-78"/>
                 <a:cs typeface="Amiri" pitchFamily="2" charset="-78"/>
               </a:rPr>
               <a:t>م</a:t>
@@ -5463,6 +5502,7 @@
                   <a:srgbClr val="8A6D1E"/>
                 </a:solidFill>
                 <a:latin typeface="Amiri" pitchFamily="2" charset="-78"/>
+                <a:ea typeface="Amiri" pitchFamily="2" charset="-78"/>
                 <a:cs typeface="Amiri" pitchFamily="2" charset="-78"/>
               </a:rPr>
               <a:t>اخْتَرْ عُنْوَانًا وَاحِدًا</a:t>
@@ -5743,6 +5783,7 @@
                   <a:srgbClr val="1B3B6F"/>
                 </a:solidFill>
                 <a:latin typeface="Amiri" pitchFamily="2" charset="-78"/>
+                <a:ea typeface="Amiri" pitchFamily="2" charset="-78"/>
                 <a:cs typeface="Amiri" pitchFamily="2" charset="-78"/>
               </a:rPr>
               <a:t>كَيْفَ تَرْتَبِطُ حَيَاتِي بِالعَالَمِ</a:t>
@@ -5781,6 +5822,7 @@
                   <a:srgbClr val="1B3B6F"/>
                 </a:solidFill>
                 <a:latin typeface="Amiri" pitchFamily="2" charset="-78"/>
+                <a:ea typeface="Amiri" pitchFamily="2" charset="-78"/>
                 <a:cs typeface="Amiri" pitchFamily="2" charset="-78"/>
               </a:rPr>
               <a:t>(أ)</a:t>
@@ -5887,6 +5929,7 @@
                   <a:srgbClr val="1B3B6F"/>
                 </a:solidFill>
                 <a:latin typeface="Amiri" pitchFamily="2" charset="-78"/>
+                <a:ea typeface="Amiri" pitchFamily="2" charset="-78"/>
                 <a:cs typeface="Amiri" pitchFamily="2" charset="-78"/>
               </a:rPr>
               <a:t>أَشْيَاءُ فِي حَيَاتِكَ مِنْ بُلْدَانٍ أُخْرَى · أَصْدِقَاؤُكَ وَتَوَاصُلُكَ · نَشَاطٌ دُوَلِيٌّ شَارَكْتَ فِيهِ · رَأْيُكَ فِي العَوْلَمَةِ وَخُطَطُكَ</a:t>
@@ -6018,6 +6061,7 @@
                   <a:srgbClr val="1B3B6F"/>
                 </a:solidFill>
                 <a:latin typeface="Amiri" pitchFamily="2" charset="-78"/>
+                <a:ea typeface="Amiri" pitchFamily="2" charset="-78"/>
                 <a:cs typeface="Amiri" pitchFamily="2" charset="-78"/>
               </a:rPr>
               <a:t>هَلِ العَوْلَمَةُ نِعْمَةٌ أَمْ نِقْمَةٌ؟</a:t>
@@ -6056,6 +6100,7 @@
                   <a:srgbClr val="1B3B6F"/>
                 </a:solidFill>
                 <a:latin typeface="Amiri" pitchFamily="2" charset="-78"/>
+                <a:ea typeface="Amiri" pitchFamily="2" charset="-78"/>
                 <a:cs typeface="Amiri" pitchFamily="2" charset="-78"/>
               </a:rPr>
               <a:t>(ب)</a:t>
@@ -6159,6 +6204,7 @@
                   <a:srgbClr val="1B3B6F"/>
                 </a:solidFill>
                 <a:latin typeface="Amiri" pitchFamily="2" charset="-78"/>
+                <a:ea typeface="Amiri" pitchFamily="2" charset="-78"/>
                 <a:cs typeface="Amiri" pitchFamily="2" charset="-78"/>
               </a:rPr>
               <a:t>المَوْضُوعُ · المَزَايَا وَالعُيُوبُ · مِثَالٌ مِنْ حَيَاتِكَ أَوْ عَائِلَتِكَ · رَأْيُكَ</a:t>
@@ -6358,6 +6404,7 @@
                   <a:srgbClr val="D4AF37"/>
                 </a:solidFill>
                 <a:latin typeface="Amiri" pitchFamily="2" charset="-78"/>
+                <a:ea typeface="Amiri" pitchFamily="2" charset="-78"/>
                 <a:cs typeface="Amiri" pitchFamily="2" charset="-78"/>
               </a:rPr>
               <a:t>م</a:t>
@@ -6678,6 +6725,7 @@
                   <a:srgbClr val="8A6D1E"/>
                 </a:solidFill>
                 <a:latin typeface="Amiri" pitchFamily="2" charset="-78"/>
+                <a:ea typeface="Amiri" pitchFamily="2" charset="-78"/>
                 <a:cs typeface="Amiri" pitchFamily="2" charset="-78"/>
               </a:rPr>
               <a:t>خُطَّةُ الكِتَابَةِ</a:t>
@@ -7302,6 +7350,7 @@
                   <a:srgbClr val="1B3B6F"/>
                 </a:solidFill>
                 <a:latin typeface="Amiri" pitchFamily="2" charset="-78"/>
+                <a:ea typeface="Amiri" pitchFamily="2" charset="-78"/>
                 <a:cs typeface="Amiri" pitchFamily="2" charset="-78"/>
               </a:rPr>
               <a:t>صُنِعَ هَاتِفِي فِي الصِّينِ.</a:t>
@@ -7401,6 +7450,7 @@
                   <a:srgbClr val="1B3B6F"/>
                 </a:solidFill>
                 <a:latin typeface="Amiri" pitchFamily="2" charset="-78"/>
+                <a:ea typeface="Amiri" pitchFamily="2" charset="-78"/>
                 <a:cs typeface="Amiri" pitchFamily="2" charset="-78"/>
               </a:rPr>
               <a:t>مِنْ نَاحِيَةٍ … وَمِنْ نَاحِيَةٍ أُخْرَى …</a:t>
@@ -7500,6 +7550,7 @@
                   <a:srgbClr val="1B3B6F"/>
                 </a:solidFill>
                 <a:latin typeface="Amiri" pitchFamily="2" charset="-78"/>
+                <a:ea typeface="Amiri" pitchFamily="2" charset="-78"/>
                 <a:cs typeface="Amiri" pitchFamily="2" charset="-78"/>
               </a:rPr>
               <a:t>إِذَا حَصَلْتُ عَلَى مِنْحَةٍ، فَسَأَدْرُسُ فِي الخَارِجِ.</a:t>
@@ -7661,6 +7712,7 @@
                   <a:srgbClr val="1F2A37"/>
                 </a:solidFill>
                 <a:latin typeface="Amiri" pitchFamily="2" charset="-78"/>
+                <a:ea typeface="Amiri" pitchFamily="2" charset="-78"/>
                 <a:cs typeface="Amiri" pitchFamily="2" charset="-78"/>
               </a:rPr>
               <a:t>أ</a:t>
@@ -7687,6 +7739,7 @@
                   <a:srgbClr val="1F2A37"/>
                 </a:solidFill>
                 <a:latin typeface="Amiri" pitchFamily="2" charset="-78"/>
+                <a:ea typeface="Amiri" pitchFamily="2" charset="-78"/>
                 <a:cs typeface="Amiri" pitchFamily="2" charset="-78"/>
               </a:rPr>
               <a:t>ب</a:t>
@@ -7833,6 +7886,7 @@
                   <a:srgbClr val="D4AF37"/>
                 </a:solidFill>
                 <a:latin typeface="Amiri" pitchFamily="2" charset="-78"/>
+                <a:ea typeface="Amiri" pitchFamily="2" charset="-78"/>
                 <a:cs typeface="Amiri" pitchFamily="2" charset="-78"/>
               </a:rPr>
               <a:t>م</a:t>
@@ -8090,6 +8144,7 @@
                   <a:srgbClr val="8A6D1E"/>
                 </a:solidFill>
                 <a:latin typeface="Amiri" pitchFamily="2" charset="-78"/>
+                <a:ea typeface="Amiri" pitchFamily="2" charset="-78"/>
                 <a:cs typeface="Amiri" pitchFamily="2" charset="-78"/>
               </a:rPr>
               <a:t>أ</a:t>
@@ -8154,6 +8209,7 @@
                   <a:srgbClr val="1B3B6F"/>
                 </a:solidFill>
                 <a:latin typeface="Amiri" pitchFamily="2" charset="-78"/>
+                <a:ea typeface="Amiri" pitchFamily="2" charset="-78"/>
                 <a:cs typeface="Amiri" pitchFamily="2" charset="-78"/>
               </a:rPr>
               <a:t>أ</a:t>
@@ -8205,6 +8261,7 @@
                   <a:srgbClr val="8A6D1E"/>
                 </a:solidFill>
                 <a:latin typeface="Amiri" pitchFamily="2" charset="-78"/>
+                <a:ea typeface="Amiri" pitchFamily="2" charset="-78"/>
                 <a:cs typeface="Amiri" pitchFamily="2" charset="-78"/>
               </a:rPr>
               <a:t>نَمُوذَجُ الإِجَابَةِ</a:t>
@@ -8318,6 +8375,7 @@
                   <a:srgbClr val="1F2A37"/>
                 </a:solidFill>
                 <a:latin typeface="Amiri" pitchFamily="2" charset="-78"/>
+                <a:ea typeface="Amiri" pitchFamily="2" charset="-78"/>
                 <a:cs typeface="Amiri" pitchFamily="2" charset="-78"/>
               </a:rPr>
               <a:t>أَعِيشُ فِي بَرِيطَانْيَا، لٰكِنَّ حَيَاتِي مُرْتَبِطَةٌ بِالعَالَمِ كُلَّ يَوْمٍ. مَثَلًا، صُنِعَ هَاتِفِي فِي الصِّينِ، وَصُنِعَتْ مَلَابِسِي فِي بَنْغْلَادِيشَ، وَزُرِعَتِ القَهْوَةُ الَّتِي يَشْرَبُهَا أَبِي فِي إِثْيُوبْيَا.</a:t>
@@ -8337,6 +8395,7 @@
                   <a:srgbClr val="1F2A37"/>
                 </a:solidFill>
                 <a:latin typeface="Amiri" pitchFamily="2" charset="-78"/>
+                <a:ea typeface="Amiri" pitchFamily="2" charset="-78"/>
                 <a:cs typeface="Amiri" pitchFamily="2" charset="-78"/>
               </a:rPr>
               <a:t>عِنْدِي أَصْدِقَاءُ فِي بُلْدَانٍ كَثِيرَةٍ. أَتَكَلَّمُ مَعَ صَدِيقَتِي سَارَا فِي كَنَدَا كُلَّ أُسْبُوعٍ، وَأَلْعَبُ عَلَى الإِنْتَرْنِتِ مَعَ بَنَاتٍ مِنْ مِصْرَ وَمَالِيزِيَا. نَتَكَلَّمُ بِالإِنْجْلِيزِيَّةِ وَأَحْيَانًا بِالعَرَبِيَّةِ مَعَ صَدِيقَتِي المِصْرِيَّةِ.</a:t>
@@ -8356,6 +8415,7 @@
                   <a:srgbClr val="1F2A37"/>
                 </a:solidFill>
                 <a:latin typeface="Amiri" pitchFamily="2" charset="-78"/>
+                <a:ea typeface="Amiri" pitchFamily="2" charset="-78"/>
                 <a:cs typeface="Amiri" pitchFamily="2" charset="-78"/>
               </a:rPr>
               <a:t>فِي المَدْرَسَةِ أَنَا عُضْوٌ فِي نَادِي نَمُوذَجِ الأُمَمِ المُتَّحِدَةِ. فِي السَّنَةِ المَاضِيَةِ مَثَّلْتُ المَغْرِبَ فِي مُؤْتَمَرٍ، وَتَكَلَّمْتُ عَنْ تَغَيُّرِ المُنَاخِ. تَعَلَّمْتُ أَنَّ المَشَاكِلَ العَالَمِيَّةَ تَحْتَاجُ إِلَى تَعَاوُنٍ بَيْنَ كُلِّ الدُّوَلِ.</a:t>
@@ -8375,6 +8435,7 @@
                   <a:srgbClr val="1F2A37"/>
                 </a:solidFill>
                 <a:latin typeface="Amiri" pitchFamily="2" charset="-78"/>
+                <a:ea typeface="Amiri" pitchFamily="2" charset="-78"/>
                 <a:cs typeface="Amiri" pitchFamily="2" charset="-78"/>
               </a:rPr>
               <a:t>مِنْ نَاحِيَةٍ، العَوْلَمَةُ مُفِيدَةٌ، لِأَنَّنَا نَتَعَلَّمُ عَنْ ثَقَافَاتٍ كَثِيرَةٍ. وَمِنْ نَاحِيَةٍ أُخْرَى، بَعْضُ العُمَّالِ رَوَاتِبُهُمْ قَلِيلَةٌ، وَيَعْمَلُونَ سَاعَاتٍ طَوِيلَةً. إِذَا حَصَلْتُ عَلَى مِنْحَةٍ، فَسَأَدْرُسُ العَلَاقَاتِ الدُّوَلِيَّةَ، لِأَنِّي أُرِيدُ أَنْ أَعْمَلَ فِي الأُمَمِ المُتَّحِدَةِ.</a:t>
@@ -8538,11 +8599,12 @@
               <a:buNone/>
             </a:pPr>
             <a:r>
-              <a:rPr lang="en-US" sz="950" b="1" dirty="0">
+              <a:rPr lang="ar-SA" sz="950" b="1" dirty="0">
                 <a:solidFill>
                   <a:srgbClr val="FFFFFF"/>
                 </a:solidFill>
                 <a:latin typeface="Calibri" pitchFamily="34" charset="0"/>
+                <a:ea typeface="Amiri" pitchFamily="2" charset="-78"/>
                 <a:cs typeface="Amiri" pitchFamily="2" charset="-78"/>
               </a:rPr>
               <a:t>صُنِعَ هَاتِفِي</a:t>
@@ -8603,11 +8665,12 @@
               <a:buNone/>
             </a:pPr>
             <a:r>
-              <a:rPr lang="en-US" sz="950" b="1" dirty="0">
+              <a:rPr lang="ar-SA" sz="950" b="1" dirty="0">
                 <a:solidFill>
                   <a:srgbClr val="FFFFFF"/>
                 </a:solidFill>
                 <a:latin typeface="Calibri" pitchFamily="34" charset="0"/>
+                <a:ea typeface="Amiri" pitchFamily="2" charset="-78"/>
                 <a:cs typeface="Amiri" pitchFamily="2" charset="-78"/>
               </a:rPr>
               <a:t>زُرِعَتِ القَهْوَةُ</a:t>
@@ -8668,11 +8731,12 @@
               <a:buNone/>
             </a:pPr>
             <a:r>
-              <a:rPr lang="en-US" sz="950" b="1" dirty="0">
+              <a:rPr lang="ar-SA" sz="950" b="1" dirty="0">
                 <a:solidFill>
                   <a:srgbClr val="FFFFFF"/>
                 </a:solidFill>
                 <a:latin typeface="Calibri" pitchFamily="34" charset="0"/>
+                <a:ea typeface="Amiri" pitchFamily="2" charset="-78"/>
                 <a:cs typeface="Amiri" pitchFamily="2" charset="-78"/>
               </a:rPr>
               <a:t>مِنْ نَاحِيَةٍ</a:t>
@@ -8733,11 +8797,12 @@
               <a:buNone/>
             </a:pPr>
             <a:r>
-              <a:rPr lang="en-US" sz="950" b="1" dirty="0">
+              <a:rPr lang="ar-SA" sz="950" b="1" dirty="0">
                 <a:solidFill>
                   <a:srgbClr val="FFFFFF"/>
                 </a:solidFill>
                 <a:latin typeface="Calibri" pitchFamily="34" charset="0"/>
+                <a:ea typeface="Amiri" pitchFamily="2" charset="-78"/>
                 <a:cs typeface="Amiri" pitchFamily="2" charset="-78"/>
               </a:rPr>
               <a:t>إِذَا حَصَلْتُ … فَسَأَدْرُسُ</a:t>
@@ -8871,6 +8936,7 @@
                   <a:srgbClr val="D4AF37"/>
                 </a:solidFill>
                 <a:latin typeface="Amiri" pitchFamily="2" charset="-78"/>
+                <a:ea typeface="Amiri" pitchFamily="2" charset="-78"/>
                 <a:cs typeface="Amiri" pitchFamily="2" charset="-78"/>
               </a:rPr>
               <a:t>م</a:t>
@@ -9128,6 +9194,7 @@
                   <a:srgbClr val="8A6D1E"/>
                 </a:solidFill>
                 <a:latin typeface="Amiri" pitchFamily="2" charset="-78"/>
+                <a:ea typeface="Amiri" pitchFamily="2" charset="-78"/>
                 <a:cs typeface="Amiri" pitchFamily="2" charset="-78"/>
               </a:rPr>
               <a:t>أ</a:t>
@@ -9192,6 +9259,7 @@
                   <a:srgbClr val="1B3B6F"/>
                 </a:solidFill>
                 <a:latin typeface="Amiri" pitchFamily="2" charset="-78"/>
+                <a:ea typeface="Amiri" pitchFamily="2" charset="-78"/>
                 <a:cs typeface="Amiri" pitchFamily="2" charset="-78"/>
               </a:rPr>
               <a:t>أ</a:t>
@@ -9243,6 +9311,7 @@
                   <a:srgbClr val="8A6D1E"/>
                 </a:solidFill>
                 <a:latin typeface="Amiri" pitchFamily="2" charset="-78"/>
+                <a:ea typeface="Amiri" pitchFamily="2" charset="-78"/>
                 <a:cs typeface="Amiri" pitchFamily="2" charset="-78"/>
               </a:rPr>
               <a:t>نَمُوذَجُ الإِجَابَةِ</a:t>
@@ -9356,6 +9425,7 @@
                   <a:srgbClr val="1F2A37"/>
                 </a:solidFill>
                 <a:latin typeface="Amiri" pitchFamily="2" charset="-78"/>
+                <a:ea typeface="Amiri" pitchFamily="2" charset="-78"/>
                 <a:cs typeface="Amiri" pitchFamily="2" charset="-78"/>
               </a:rPr>
               <a:t>قَبْلَ أَنْ أَخْرُجَ مِنَ البَيْتِ كُلَّ صَبَاحٍ، أَكُونُ قَدْ زُرْتُ ثَلَاثَ قَارَّاتٍ دُونَ أَنْ أَتَحَرَّكَ: فَقَهْوَةُ أُمِّي زُرِعَتْ فِي إِثْيُوبْيَا، وَهَاتِفِي صُنِعَ فِي الصِّينِ، وَالأَخْبَارُ الَّتِي أَقْرَؤُهَا تُكْتَبُ فِي نِيُويُورْكَ وَالدَّوْحَةِ، وَتُقْرَأُ فِي كُلِّ مَكَانٍ.</a:t>
@@ -9375,6 +9445,7 @@
                   <a:srgbClr val="1F2A37"/>
                 </a:solidFill>
                 <a:latin typeface="Amiri" pitchFamily="2" charset="-78"/>
+                <a:ea typeface="Amiri" pitchFamily="2" charset="-78"/>
                 <a:cs typeface="Amiri" pitchFamily="2" charset="-78"/>
               </a:rPr>
               <a:t>وَلَا تَقِفُ هٰذِهِ الرَّوَابِطُ عِنْدَ الأَشْيَاءِ؛ فَلِي صَدِيقَاتٌ فِي كَنَدَا وَمَالِيزِيَا وَمِصْرَ، نَتَبَادَلُ مَعَهُنَّ الآرَاءَ وَالأَغَانِيَ وَالوَصَفَاتِ، حَتَّى صِرْتُ أَشْعُرُ بِأَنَّ الحُدُودَ خُطُوطٌ عَلَى الخَرِيطَةِ أَكْثَرَ مِنْهَا جُدْرَانًا بَيْنَ البَشَرِ، وَأَنَّ الصَّدَاقَةَ لَا تَحْتَاجُ إِلَى جَوَازِ سَفَرٍ.</a:t>
@@ -9394,6 +9465,7 @@
                   <a:srgbClr val="1F2A37"/>
                 </a:solidFill>
                 <a:latin typeface="Amiri" pitchFamily="2" charset="-78"/>
+                <a:ea typeface="Amiri" pitchFamily="2" charset="-78"/>
                 <a:cs typeface="Amiri" pitchFamily="2" charset="-78"/>
               </a:rPr>
               <a:t>وَقَدْ تَعَمَّقَ هٰذَا الشُّعُورُ حِينَ مَثَّلْتُ المَغْرِبَ فِي نَمُوذَجِ الأُمَمِ المُتَّحِدَةِ؛ إِذْ أَدْرَكْتُ أَنَّ الجَفَافَ فِي إِفْرِيقْيَا لَيْسَ خَبَرًا بَعِيدًا، بَلْ قَضِيَّةٌ تَرْتَبِطُ بِمَا نَسْتَهْلِكُهُ نَحْنُ فِي لَنْدَنَ مِنْ طَاقَةٍ وَمَلَابِسَ وَطَعَامٍ.</a:t>
@@ -9413,6 +9485,7 @@
                   <a:srgbClr val="1F2A37"/>
                 </a:solidFill>
                 <a:latin typeface="Amiri" pitchFamily="2" charset="-78"/>
+                <a:ea typeface="Amiri" pitchFamily="2" charset="-78"/>
                 <a:cs typeface="Amiri" pitchFamily="2" charset="-78"/>
               </a:rPr>
               <a:t>صَحِيحٌ أَنَّ العَوْلَمَةَ لَيْسَتْ عَادِلَةً دَائِمًا، غَيْرَ أَنَّهَا تُتِيحُ لِجِيلِنَا فُرْصَةً لَمْ يَحْظَ بِهَا أَجْدَادُنَا: أَنْ نَعْرِفَ العَالَمَ وَنُغَيِّرَهُ. وَلَوْ عَمِلْتُ يَوْمًا فِي الأُمَمِ المُتَّحِدَةِ، لَجَعَلْتُ صَوْتَ الشَّبَابِ مَسْمُوعًا فِي كُلِّ قَرَارٍ.</a:t>
@@ -9511,11 +9584,12 @@
               <a:buNone/>
             </a:pPr>
             <a:r>
-              <a:rPr lang="en-US" sz="950" b="1" dirty="0">
+              <a:rPr lang="ar-SA" sz="950" b="1" dirty="0">
                 <a:solidFill>
                   <a:srgbClr val="FFFFFF"/>
                 </a:solidFill>
                 <a:latin typeface="Calibri" pitchFamily="34" charset="0"/>
+                <a:ea typeface="Amiri" pitchFamily="2" charset="-78"/>
                 <a:cs typeface="Amiri" pitchFamily="2" charset="-78"/>
               </a:rPr>
               <a:t>أَكُونُ قَدْ زُرْتُ</a:t>
@@ -9576,11 +9650,12 @@
               <a:buNone/>
             </a:pPr>
             <a:r>
-              <a:rPr lang="en-US" sz="950" b="1" dirty="0">
+              <a:rPr lang="ar-SA" sz="950" b="1" dirty="0">
                 <a:solidFill>
                   <a:srgbClr val="FFFFFF"/>
                 </a:solidFill>
                 <a:latin typeface="Calibri" pitchFamily="34" charset="0"/>
+                <a:ea typeface="Amiri" pitchFamily="2" charset="-78"/>
                 <a:cs typeface="Amiri" pitchFamily="2" charset="-78"/>
               </a:rPr>
               <a:t>أَكْثَرَ مِنْهَا جُدْرَانًا</a:t>
@@ -9641,11 +9716,12 @@
               <a:buNone/>
             </a:pPr>
             <a:r>
-              <a:rPr lang="en-US" sz="950" b="1" dirty="0">
+              <a:rPr lang="ar-SA" sz="950" b="1" dirty="0">
                 <a:solidFill>
                   <a:srgbClr val="FFFFFF"/>
                 </a:solidFill>
                 <a:latin typeface="Calibri" pitchFamily="34" charset="0"/>
+                <a:ea typeface="Amiri" pitchFamily="2" charset="-78"/>
                 <a:cs typeface="Amiri" pitchFamily="2" charset="-78"/>
               </a:rPr>
               <a:t>لَيْسَ خَبَرًا بَعِيدًا، بَلْ</a:t>
@@ -9706,11 +9782,12 @@
               <a:buNone/>
             </a:pPr>
             <a:r>
-              <a:rPr lang="en-US" sz="950" b="1" dirty="0">
+              <a:rPr lang="ar-SA" sz="950" b="1" dirty="0">
                 <a:solidFill>
                   <a:srgbClr val="FFFFFF"/>
                 </a:solidFill>
                 <a:latin typeface="Calibri" pitchFamily="34" charset="0"/>
+                <a:ea typeface="Amiri" pitchFamily="2" charset="-78"/>
                 <a:cs typeface="Amiri" pitchFamily="2" charset="-78"/>
               </a:rPr>
               <a:t>لَوْ عَمِلْتُ … لَجَعَلْتُ</a:t>
@@ -9844,6 +9921,7 @@
                   <a:srgbClr val="D4AF37"/>
                 </a:solidFill>
                 <a:latin typeface="Amiri" pitchFamily="2" charset="-78"/>
+                <a:ea typeface="Amiri" pitchFamily="2" charset="-78"/>
                 <a:cs typeface="Amiri" pitchFamily="2" charset="-78"/>
               </a:rPr>
               <a:t>م</a:t>
@@ -10101,6 +10179,7 @@
                   <a:srgbClr val="8A6D1E"/>
                 </a:solidFill>
                 <a:latin typeface="Amiri" pitchFamily="2" charset="-78"/>
+                <a:ea typeface="Amiri" pitchFamily="2" charset="-78"/>
                 <a:cs typeface="Amiri" pitchFamily="2" charset="-78"/>
               </a:rPr>
               <a:t>ب</a:t>
@@ -10165,6 +10244,7 @@
                   <a:srgbClr val="1B3B6F"/>
                 </a:solidFill>
                 <a:latin typeface="Amiri" pitchFamily="2" charset="-78"/>
+                <a:ea typeface="Amiri" pitchFamily="2" charset="-78"/>
                 <a:cs typeface="Amiri" pitchFamily="2" charset="-78"/>
               </a:rPr>
               <a:t>ب</a:t>
@@ -10216,6 +10296,7 @@
                   <a:srgbClr val="8A6D1E"/>
                 </a:solidFill>
                 <a:latin typeface="Amiri" pitchFamily="2" charset="-78"/>
+                <a:ea typeface="Amiri" pitchFamily="2" charset="-78"/>
                 <a:cs typeface="Amiri" pitchFamily="2" charset="-78"/>
               </a:rPr>
               <a:t>نَمُوذَجُ الإِجَابَةِ</a:t>
@@ -10329,6 +10410,7 @@
                   <a:srgbClr val="1F2A37"/>
                 </a:solidFill>
                 <a:latin typeface="Amiri" pitchFamily="2" charset="-78"/>
+                <a:ea typeface="Amiri" pitchFamily="2" charset="-78"/>
                 <a:cs typeface="Amiri" pitchFamily="2" charset="-78"/>
               </a:rPr>
               <a:t>نَعِيشُ فِي عَالَمٍ يُصْنَعُ فِيهِ الهَاتِفُ الوَاحِدُ فِي عَشْرِ دُوَلٍ، وَتُشَاهَدُ فِيهِ الأُغْنِيَةُ نَفْسُهَا فِي كُلِّ القَارَّاتِ خِلَالَ يَوْمٍ وَاحِدٍ، وَتُنْقَلُ الأَخْبَارُ قَبْلَ أَنْ تَنْتَهِيَ الأَحْدَاثُ. فَهَلِ العَوْلَمَةُ نِعْمَةٌ أَمْ نِقْمَةٌ؟</a:t>
@@ -10348,6 +10430,7 @@
                   <a:srgbClr val="1F2A37"/>
                 </a:solidFill>
                 <a:latin typeface="Amiri" pitchFamily="2" charset="-78"/>
+                <a:ea typeface="Amiri" pitchFamily="2" charset="-78"/>
                 <a:cs typeface="Amiri" pitchFamily="2" charset="-78"/>
               </a:rPr>
               <a:t>مِنْ نَاحِيَةٍ، أَخْرَجَتِ التِّجَارَةُ الدُّوَلِيَّةُ مَلَايِينَ النَّاسِ مِنَ الفَقْرِ، وَجَعَلَتِ المَعْرِفَةَ وَالدَّوَاءَ فِي مُتَنَاوَلِ عَدَدٍ أَكْبَرَ مِنَ البَشَرِ، كَمَا فَتَحَتْ أَسْوَاقًا جَدِيدَةً لِلشَّرِكَاتِ الصَّغِيرَةِ. وَمِنْ نَاحِيَةٍ أُخْرَى، تُغْلَقُ المَصَانِعُ المَحَلِّيَّةُ أَحْيَانًا لِأَنَّ الإِنْتَاجَ أَرْخَصُ فِي مَكَانٍ آخَرَ، مِمَّا يُفْقِدُ العُمَّالَ وَظَائِفَهُمْ، وَتُهَدَّدُ الثَّقَافَاتُ الصَّغِيرَةُ أَمَامَ الثَّقَافَاتِ الأَقْوَى.</a:t>
@@ -10367,6 +10450,7 @@
                   <a:srgbClr val="1F2A37"/>
                 </a:solidFill>
                 <a:latin typeface="Amiri" pitchFamily="2" charset="-78"/>
+                <a:ea typeface="Amiri" pitchFamily="2" charset="-78"/>
                 <a:cs typeface="Amiri" pitchFamily="2" charset="-78"/>
               </a:rPr>
               <a:t>وَقَدْ رَأَيْتُ الوَجْهَيْنِ فِي عَائِلَتِي؛ فَعَمِّي فِي المَغْرِبِ فَقَدَ عَمَلَهُ فِي مَصْنَعِ نَسِيجٍ نُقِلَ إِلَى آسْيَا، بَيْنَمَا وَجَدَتِ ابْنَتُهُ عَمَلًا فِي شَرِكَةٍ دُوَلِيَّةٍ لِلتَّصْدِيرِ بِفَضْلِ لُغَاتِهَا وَشَهَادَتِهَا الجَامِعِيَّةِ.</a:t>
@@ -10386,6 +10470,7 @@
                   <a:srgbClr val="1F2A37"/>
                 </a:solidFill>
                 <a:latin typeface="Amiri" pitchFamily="2" charset="-78"/>
+                <a:ea typeface="Amiri" pitchFamily="2" charset="-78"/>
                 <a:cs typeface="Amiri" pitchFamily="2" charset="-78"/>
               </a:rPr>
               <a:t>لِذٰلِكَ أَرَى أَنَّ العَوْلَمَةَ لَيْسَتْ نِعْمَةً خَالِصَةً وَلَا نِقْمَةً خَالِصَةً، بَلْ قُوَّةٌ تَحْتَاجُ إِلَى قَوَانِينَ عَادِلَةٍ وَحُكُومَاتٍ مَسْؤُولَةٍ. فَإِذَا وُضِعَ الإِنْسَانُ قَبْلَ الرِّبْحِ، فَسَتُصْبِحُ نِعْمَةً لِلْجَمِيعِ لَا لِلْقِلَّةِ.</a:t>
@@ -10484,11 +10569,12 @@
               <a:buNone/>
             </a:pPr>
             <a:r>
-              <a:rPr lang="en-US" sz="950" b="1" dirty="0">
+              <a:rPr lang="ar-SA" sz="950" b="1" dirty="0">
                 <a:solidFill>
                   <a:srgbClr val="FFFFFF"/>
                 </a:solidFill>
                 <a:latin typeface="Calibri" pitchFamily="34" charset="0"/>
+                <a:ea typeface="Amiri" pitchFamily="2" charset="-78"/>
                 <a:cs typeface="Amiri" pitchFamily="2" charset="-78"/>
               </a:rPr>
               <a:t>يُصْنَعُ فِيهِ … وَتُشَاهَدُ فِيهِ</a:t>
@@ -10549,11 +10635,12 @@
               <a:buNone/>
             </a:pPr>
             <a:r>
-              <a:rPr lang="en-US" sz="950" b="1" dirty="0">
+              <a:rPr lang="ar-SA" sz="950" b="1" dirty="0">
                 <a:solidFill>
                   <a:srgbClr val="FFFFFF"/>
                 </a:solidFill>
                 <a:latin typeface="Calibri" pitchFamily="34" charset="0"/>
+                <a:ea typeface="Amiri" pitchFamily="2" charset="-78"/>
                 <a:cs typeface="Amiri" pitchFamily="2" charset="-78"/>
               </a:rPr>
               <a:t>فِي مُتَنَاوَلِ</a:t>
@@ -10614,11 +10701,12 @@
               <a:buNone/>
             </a:pPr>
             <a:r>
-              <a:rPr lang="en-US" sz="950" b="1" dirty="0">
+              <a:rPr lang="ar-SA" sz="950" b="1" dirty="0">
                 <a:solidFill>
                   <a:srgbClr val="FFFFFF"/>
                 </a:solidFill>
                 <a:latin typeface="Calibri" pitchFamily="34" charset="0"/>
+                <a:ea typeface="Amiri" pitchFamily="2" charset="-78"/>
                 <a:cs typeface="Amiri" pitchFamily="2" charset="-78"/>
               </a:rPr>
               <a:t>نُقِلَ إِلَى آسْيَا، بَيْنَمَا</a:t>
@@ -10679,11 +10767,12 @@
               <a:buNone/>
             </a:pPr>
             <a:r>
-              <a:rPr lang="en-US" sz="950" b="1" dirty="0">
+              <a:rPr lang="ar-SA" sz="950" b="1" dirty="0">
                 <a:solidFill>
                   <a:srgbClr val="FFFFFF"/>
                 </a:solidFill>
                 <a:latin typeface="Calibri" pitchFamily="34" charset="0"/>
+                <a:ea typeface="Amiri" pitchFamily="2" charset="-78"/>
                 <a:cs typeface="Amiri" pitchFamily="2" charset="-78"/>
               </a:rPr>
               <a:t>إِذَا وُضِعَ … فَسَتُصْبِحُ</a:t>
@@ -10817,6 +10906,7 @@
                   <a:srgbClr val="D4AF37"/>
                 </a:solidFill>
                 <a:latin typeface="Amiri" pitchFamily="2" charset="-78"/>
+                <a:ea typeface="Amiri" pitchFamily="2" charset="-78"/>
                 <a:cs typeface="Amiri" pitchFamily="2" charset="-78"/>
               </a:rPr>
               <a:t>م</a:t>
@@ -11137,6 +11227,7 @@
                   <a:srgbClr val="8A6D1E"/>
                 </a:solidFill>
                 <a:latin typeface="Amiri" pitchFamily="2" charset="-78"/>
+                <a:ea typeface="Amiri" pitchFamily="2" charset="-78"/>
                 <a:cs typeface="Amiri" pitchFamily="2" charset="-78"/>
               </a:rPr>
               <a:t>قَيِّمْ عَمَلَكَ</a:t>
@@ -12381,6 +12472,7 @@
                   <a:srgbClr val="FFFFFF"/>
                 </a:solidFill>
                 <a:latin typeface="Amiri" pitchFamily="2" charset="-78"/>
+                <a:ea typeface="Amiri" pitchFamily="2" charset="-78"/>
                 <a:cs typeface="Amiri" pitchFamily="2" charset="-78"/>
               </a:rPr>
               <a:t>أَحْسَنْتُمْ! إِلَى اللِّقَاءِ</a:t>
@@ -12533,6 +12625,7 @@
                   <a:srgbClr val="D4AF37"/>
                 </a:solidFill>
                 <a:latin typeface="Amiri" pitchFamily="2" charset="-78"/>
+                <a:ea typeface="Amiri" pitchFamily="2" charset="-78"/>
                 <a:cs typeface="Amiri" pitchFamily="2" charset="-78"/>
               </a:rPr>
               <a:t>وَرْشَةُ التَّدْرِيبِ</a:t>
@@ -12666,6 +12759,7 @@
                   <a:srgbClr val="D4AF37"/>
                 </a:solidFill>
                 <a:latin typeface="Amiri" pitchFamily="2" charset="-78"/>
+                <a:ea typeface="Amiri" pitchFamily="2" charset="-78"/>
                 <a:cs typeface="Amiri" pitchFamily="2" charset="-78"/>
               </a:rPr>
               <a:t>م</a:t>
@@ -12986,6 +13080,7 @@
                   <a:srgbClr val="8A6D1E"/>
                 </a:solidFill>
                 <a:latin typeface="Amiri" pitchFamily="2" charset="-78"/>
+                <a:ea typeface="Amiri" pitchFamily="2" charset="-78"/>
                 <a:cs typeface="Amiri" pitchFamily="2" charset="-78"/>
               </a:rPr>
               <a:t>آدَابُ الصَّفِّ</a:t>
@@ -14517,6 +14612,7 @@
                   <a:srgbClr val="D4AF37"/>
                 </a:solidFill>
                 <a:latin typeface="Amiri" pitchFamily="2" charset="-78"/>
+                <a:ea typeface="Amiri" pitchFamily="2" charset="-78"/>
                 <a:cs typeface="Amiri" pitchFamily="2" charset="-78"/>
               </a:rPr>
               <a:t>م</a:t>
@@ -14837,6 +14933,7 @@
                   <a:srgbClr val="8A6D1E"/>
                 </a:solidFill>
                 <a:latin typeface="Amiri" pitchFamily="2" charset="-78"/>
+                <a:ea typeface="Amiri" pitchFamily="2" charset="-78"/>
                 <a:cs typeface="Amiri" pitchFamily="2" charset="-78"/>
               </a:rPr>
               <a:t>خَرِيطَةُ الوَرْشَةِ</a:t>
@@ -15151,6 +15248,7 @@
                   <a:srgbClr val="1B3B6F"/>
                 </a:solidFill>
                 <a:latin typeface="Amiri" pitchFamily="2" charset="-78"/>
+                <a:ea typeface="Amiri" pitchFamily="2" charset="-78"/>
                 <a:cs typeface="Amiri" pitchFamily="2" charset="-78"/>
               </a:rPr>
               <a:t>كَيْفَ</a:t>
@@ -15427,6 +15525,7 @@
                   <a:srgbClr val="1E6B52"/>
                 </a:solidFill>
                 <a:latin typeface="Amiri" pitchFamily="2" charset="-78"/>
+                <a:ea typeface="Amiri" pitchFamily="2" charset="-78"/>
                 <a:cs typeface="Amiri" pitchFamily="2" charset="-78"/>
               </a:rPr>
               <a:t>الاسْتِمَارَةُ</a:t>
@@ -15703,6 +15802,7 @@
                   <a:srgbClr val="1E6B52"/>
                 </a:solidFill>
                 <a:latin typeface="Amiri" pitchFamily="2" charset="-78"/>
+                <a:ea typeface="Amiri" pitchFamily="2" charset="-78"/>
                 <a:cs typeface="Amiri" pitchFamily="2" charset="-78"/>
               </a:rPr>
               <a:t>الرِّسَالَةُ</a:t>
@@ -15979,6 +16079,7 @@
                   <a:srgbClr val="1E6B52"/>
                 </a:solidFill>
                 <a:latin typeface="Amiri" pitchFamily="2" charset="-78"/>
+                <a:ea typeface="Amiri" pitchFamily="2" charset="-78"/>
                 <a:cs typeface="Amiri" pitchFamily="2" charset="-78"/>
               </a:rPr>
               <a:t>المَقَالُ</a:t>
@@ -16255,6 +16356,7 @@
                   <a:srgbClr val="8A6D1E"/>
                 </a:solidFill>
                 <a:latin typeface="Amiri" pitchFamily="2" charset="-78"/>
+                <a:ea typeface="Amiri" pitchFamily="2" charset="-78"/>
                 <a:cs typeface="Amiri" pitchFamily="2" charset="-78"/>
               </a:rPr>
               <a:t>قَيِّمْ</a:t>
@@ -16498,6 +16600,7 @@
                   <a:srgbClr val="D4AF37"/>
                 </a:solidFill>
                 <a:latin typeface="Amiri" pitchFamily="2" charset="-78"/>
+                <a:ea typeface="Amiri" pitchFamily="2" charset="-78"/>
                 <a:cs typeface="Amiri" pitchFamily="2" charset="-78"/>
               </a:rPr>
               <a:t>م</a:t>
@@ -16818,6 +16921,7 @@
                   <a:srgbClr val="8A6D1E"/>
                 </a:solidFill>
                 <a:latin typeface="Amiri" pitchFamily="2" charset="-78"/>
+                <a:ea typeface="Amiri" pitchFamily="2" charset="-78"/>
                 <a:cs typeface="Amiri" pitchFamily="2" charset="-78"/>
               </a:rPr>
               <a:t>امْتِحَانُ الكِتَابَةِ</a:t>
@@ -17442,6 +17546,7 @@
                   <a:srgbClr val="1B3B6F"/>
                 </a:solidFill>
                 <a:latin typeface="Amiri" pitchFamily="2" charset="-78"/>
+                <a:ea typeface="Amiri" pitchFamily="2" charset="-78"/>
                 <a:cs typeface="Amiri" pitchFamily="2" charset="-78"/>
               </a:rPr>
               <a:t>صُنِعَ هَاتِفِي فِي الصِّينِ، وَصُنِعَتْ مَلَابِسِي فِي بَنْغْلَادِيشَ</a:t>
@@ -17541,6 +17646,7 @@
                   <a:srgbClr val="1B3B6F"/>
                 </a:solidFill>
                 <a:latin typeface="Amiri" pitchFamily="2" charset="-78"/>
+                <a:ea typeface="Amiri" pitchFamily="2" charset="-78"/>
                 <a:cs typeface="Amiri" pitchFamily="2" charset="-78"/>
               </a:rPr>
               <a:t>إِذَا حَصَلْتُ عَلَى مِنْحَةٍ، فَسَأَدْرُسُ …</a:t>
@@ -17640,6 +17746,7 @@
                   <a:srgbClr val="1B3B6F"/>
                 </a:solidFill>
                 <a:latin typeface="Amiri" pitchFamily="2" charset="-78"/>
+                <a:ea typeface="Amiri" pitchFamily="2" charset="-78"/>
                 <a:cs typeface="Amiri" pitchFamily="2" charset="-78"/>
               </a:rPr>
               <a:t>مِنْ نَاحِيَةٍ … ، وَمِنْ نَاحِيَةٍ أُخْرَى …</a:t>
@@ -17811,6 +17918,7 @@
                   <a:srgbClr val="D4AF37"/>
                 </a:solidFill>
                 <a:latin typeface="Amiri" pitchFamily="2" charset="-78"/>
+                <a:ea typeface="Amiri" pitchFamily="2" charset="-78"/>
                 <a:cs typeface="Amiri" pitchFamily="2" charset="-78"/>
               </a:rPr>
               <a:t>م</a:t>
@@ -18131,6 +18239,7 @@
                   <a:srgbClr val="8A6D1E"/>
                 </a:solidFill>
                 <a:latin typeface="Amiri" pitchFamily="2" charset="-78"/>
+                <a:ea typeface="Amiri" pitchFamily="2" charset="-78"/>
                 <a:cs typeface="Amiri" pitchFamily="2" charset="-78"/>
               </a:rPr>
               <a:t>اسْتِمَارَةُ مَنْدُوبِ نَمُوذَجِ الأُمَمِ المُتَّحِدَةِ</a:t>
@@ -18487,6 +18596,7 @@
                   <a:srgbClr val="1B3B6F"/>
                 </a:solidFill>
                 <a:latin typeface="Amiri" pitchFamily="2" charset="-78"/>
+                <a:ea typeface="Amiri" pitchFamily="2" charset="-78"/>
                 <a:cs typeface="Amiri" pitchFamily="2" charset="-78"/>
               </a:rPr>
               <a:t>الاسْمُ</a:t>
@@ -18731,6 +18841,7 @@
                   <a:srgbClr val="1B3B6F"/>
                 </a:solidFill>
                 <a:latin typeface="Amiri" pitchFamily="2" charset="-78"/>
+                <a:ea typeface="Amiri" pitchFamily="2" charset="-78"/>
                 <a:cs typeface="Amiri" pitchFamily="2" charset="-78"/>
               </a:rPr>
               <a:t>المَدْرَسَةُ</a:t>
@@ -18975,6 +19086,7 @@
                   <a:srgbClr val="1B3B6F"/>
                 </a:solidFill>
                 <a:latin typeface="Amiri" pitchFamily="2" charset="-78"/>
+                <a:ea typeface="Amiri" pitchFamily="2" charset="-78"/>
                 <a:cs typeface="Amiri" pitchFamily="2" charset="-78"/>
               </a:rPr>
               <a:t>البَلَدُ الَّذِي تُمَثِّلِينَهُ</a:t>
@@ -19219,6 +19331,7 @@
                   <a:srgbClr val="1B3B6F"/>
                 </a:solidFill>
                 <a:latin typeface="Amiri" pitchFamily="2" charset="-78"/>
+                <a:ea typeface="Amiri" pitchFamily="2" charset="-78"/>
                 <a:cs typeface="Amiri" pitchFamily="2" charset="-78"/>
               </a:rPr>
               <a:t>اللَّجْنَةُ</a:t>
@@ -19463,6 +19576,7 @@
                   <a:srgbClr val="1B3B6F"/>
                 </a:solidFill>
                 <a:latin typeface="Amiri" pitchFamily="2" charset="-78"/>
+                <a:ea typeface="Amiri" pitchFamily="2" charset="-78"/>
                 <a:cs typeface="Amiri" pitchFamily="2" charset="-78"/>
               </a:rPr>
               <a:t>القَضِيَّةُ</a:t>
@@ -19707,6 +19821,7 @@
                   <a:srgbClr val="1B3B6F"/>
                 </a:solidFill>
                 <a:latin typeface="Amiri" pitchFamily="2" charset="-78"/>
+                <a:ea typeface="Amiri" pitchFamily="2" charset="-78"/>
                 <a:cs typeface="Amiri" pitchFamily="2" charset="-78"/>
               </a:rPr>
               <a:t>اللُّغَاتُ</a:t>
@@ -19951,6 +20066,7 @@
                   <a:srgbClr val="1B3B6F"/>
                 </a:solidFill>
                 <a:latin typeface="Amiri" pitchFamily="2" charset="-78"/>
+                <a:ea typeface="Amiri" pitchFamily="2" charset="-78"/>
                 <a:cs typeface="Amiri" pitchFamily="2" charset="-78"/>
               </a:rPr>
               <a:t>خِبْرَةٌ سَابِقَةٌ</a:t>
@@ -20130,6 +20246,7 @@
                   <a:srgbClr val="1B3B6F"/>
                 </a:solidFill>
                 <a:latin typeface="Amiri" pitchFamily="2" charset="-78"/>
+                <a:ea typeface="Amiri" pitchFamily="2" charset="-78"/>
                 <a:cs typeface="Amiri" pitchFamily="2" charset="-78"/>
               </a:rPr>
               <a:t>جُمْلَةٌ: مَا اقْتِرَاحُكِ؟</a:t>
@@ -20339,6 +20456,7 @@
                   <a:srgbClr val="D4AF37"/>
                 </a:solidFill>
                 <a:latin typeface="Amiri" pitchFamily="2" charset="-78"/>
+                <a:ea typeface="Amiri" pitchFamily="2" charset="-78"/>
                 <a:cs typeface="Amiri" pitchFamily="2" charset="-78"/>
               </a:rPr>
               <a:t>م</a:t>
@@ -20659,6 +20777,7 @@
                   <a:srgbClr val="8A6D1E"/>
                 </a:solidFill>
                 <a:latin typeface="Amiri" pitchFamily="2" charset="-78"/>
+                <a:ea typeface="Amiri" pitchFamily="2" charset="-78"/>
                 <a:cs typeface="Amiri" pitchFamily="2" charset="-78"/>
               </a:rPr>
               <a:t>نَمُوذَجُ الإِجَابَةِ</a:t>
@@ -20977,6 +21096,7 @@
                   <a:srgbClr val="1B3B6F"/>
                 </a:solidFill>
                 <a:latin typeface="Amiri" pitchFamily="2" charset="-78"/>
+                <a:ea typeface="Amiri" pitchFamily="2" charset="-78"/>
                 <a:cs typeface="Amiri" pitchFamily="2" charset="-78"/>
               </a:rPr>
               <a:t>هِبَةُ يُوسُفَ</a:t>
@@ -21015,6 +21135,7 @@
                   <a:srgbClr val="1B3B6F"/>
                 </a:solidFill>
                 <a:latin typeface="Amiri" pitchFamily="2" charset="-78"/>
+                <a:ea typeface="Amiri" pitchFamily="2" charset="-78"/>
                 <a:cs typeface="Amiri" pitchFamily="2" charset="-78"/>
               </a:rPr>
               <a:t>الاسْمُ</a:t>
@@ -21156,6 +21277,7 @@
                   <a:srgbClr val="1B3B6F"/>
                 </a:solidFill>
                 <a:latin typeface="Amiri" pitchFamily="2" charset="-78"/>
+                <a:ea typeface="Amiri" pitchFamily="2" charset="-78"/>
                 <a:cs typeface="Amiri" pitchFamily="2" charset="-78"/>
               </a:rPr>
               <a:t>مَدْرَسَةُ المَدِينَةِ</a:t>
@@ -21194,6 +21316,7 @@
                   <a:srgbClr val="1B3B6F"/>
                 </a:solidFill>
                 <a:latin typeface="Amiri" pitchFamily="2" charset="-78"/>
+                <a:ea typeface="Amiri" pitchFamily="2" charset="-78"/>
                 <a:cs typeface="Amiri" pitchFamily="2" charset="-78"/>
               </a:rPr>
               <a:t>المَدْرَسَةُ</a:t>
@@ -21335,6 +21458,7 @@
                   <a:srgbClr val="1B3B6F"/>
                 </a:solidFill>
                 <a:latin typeface="Amiri" pitchFamily="2" charset="-78"/>
+                <a:ea typeface="Amiri" pitchFamily="2" charset="-78"/>
                 <a:cs typeface="Amiri" pitchFamily="2" charset="-78"/>
               </a:rPr>
               <a:t>المَغْرِبُ</a:t>
@@ -21373,6 +21497,7 @@
                   <a:srgbClr val="1B3B6F"/>
                 </a:solidFill>
                 <a:latin typeface="Amiri" pitchFamily="2" charset="-78"/>
+                <a:ea typeface="Amiri" pitchFamily="2" charset="-78"/>
                 <a:cs typeface="Amiri" pitchFamily="2" charset="-78"/>
               </a:rPr>
               <a:t>البَلَدُ الَّذِي تُمَثِّلِينَهُ</a:t>
@@ -21514,6 +21639,7 @@
                   <a:srgbClr val="1B3B6F"/>
                 </a:solidFill>
                 <a:latin typeface="Amiri" pitchFamily="2" charset="-78"/>
+                <a:ea typeface="Amiri" pitchFamily="2" charset="-78"/>
                 <a:cs typeface="Amiri" pitchFamily="2" charset="-78"/>
               </a:rPr>
               <a:t>لَجْنَةُ البِيئَةِ</a:t>
@@ -21552,6 +21678,7 @@
                   <a:srgbClr val="1B3B6F"/>
                 </a:solidFill>
                 <a:latin typeface="Amiri" pitchFamily="2" charset="-78"/>
+                <a:ea typeface="Amiri" pitchFamily="2" charset="-78"/>
                 <a:cs typeface="Amiri" pitchFamily="2" charset="-78"/>
               </a:rPr>
               <a:t>اللَّجْنَةُ</a:t>
@@ -21693,6 +21820,7 @@
                   <a:srgbClr val="1B3B6F"/>
                 </a:solidFill>
                 <a:latin typeface="Amiri" pitchFamily="2" charset="-78"/>
+                <a:ea typeface="Amiri" pitchFamily="2" charset="-78"/>
                 <a:cs typeface="Amiri" pitchFamily="2" charset="-78"/>
               </a:rPr>
               <a:t>الجَفَافُ فِي إِفْرِيقْيَا</a:t>
@@ -21731,6 +21859,7 @@
                   <a:srgbClr val="1B3B6F"/>
                 </a:solidFill>
                 <a:latin typeface="Amiri" pitchFamily="2" charset="-78"/>
+                <a:ea typeface="Amiri" pitchFamily="2" charset="-78"/>
                 <a:cs typeface="Amiri" pitchFamily="2" charset="-78"/>
               </a:rPr>
               <a:t>القَضِيَّةُ</a:t>
@@ -21872,6 +22001,7 @@
                   <a:srgbClr val="1B3B6F"/>
                 </a:solidFill>
                 <a:latin typeface="Amiri" pitchFamily="2" charset="-78"/>
+                <a:ea typeface="Amiri" pitchFamily="2" charset="-78"/>
                 <a:cs typeface="Amiri" pitchFamily="2" charset="-78"/>
               </a:rPr>
               <a:t>الإِنْجْلِيزِيَّةُ وَالعَرَبِيَّةُ وَالفَرَنْسِيَّةُ</a:t>
@@ -21910,6 +22040,7 @@
                   <a:srgbClr val="1B3B6F"/>
                 </a:solidFill>
                 <a:latin typeface="Amiri" pitchFamily="2" charset="-78"/>
+                <a:ea typeface="Amiri" pitchFamily="2" charset="-78"/>
                 <a:cs typeface="Amiri" pitchFamily="2" charset="-78"/>
               </a:rPr>
               <a:t>اللُّغَاتُ</a:t>
@@ -22051,6 +22182,7 @@
                   <a:srgbClr val="1B3B6F"/>
                 </a:solidFill>
                 <a:latin typeface="Amiri" pitchFamily="2" charset="-78"/>
+                <a:ea typeface="Amiri" pitchFamily="2" charset="-78"/>
                 <a:cs typeface="Amiri" pitchFamily="2" charset="-78"/>
               </a:rPr>
               <a:t>مُؤْتَمَرُ لَنْدَنَ ٢٠٢٥</a:t>
@@ -22089,6 +22221,7 @@
                   <a:srgbClr val="1B3B6F"/>
                 </a:solidFill>
                 <a:latin typeface="Amiri" pitchFamily="2" charset="-78"/>
+                <a:ea typeface="Amiri" pitchFamily="2" charset="-78"/>
                 <a:cs typeface="Amiri" pitchFamily="2" charset="-78"/>
               </a:rPr>
               <a:t>خِبْرَةٌ سَابِقَةٌ</a:t>
@@ -22230,6 +22363,7 @@
                   <a:srgbClr val="1B3B6F"/>
                 </a:solidFill>
                 <a:latin typeface="Amiri" pitchFamily="2" charset="-78"/>
+                <a:ea typeface="Amiri" pitchFamily="2" charset="-78"/>
                 <a:cs typeface="Amiri" pitchFamily="2" charset="-78"/>
               </a:rPr>
               <a:t>إِذَا دُعِمَ المُزَارِعُونَ بِالمَاءِ وَالتَّدْرِيبِ، فَسَيَقِلُّ الجُوعُ فِي المِنْطَقَةِ.</a:t>
@@ -22268,6 +22402,7 @@
                   <a:srgbClr val="1B3B6F"/>
                 </a:solidFill>
                 <a:latin typeface="Amiri" pitchFamily="2" charset="-78"/>
+                <a:ea typeface="Amiri" pitchFamily="2" charset="-78"/>
                 <a:cs typeface="Amiri" pitchFamily="2" charset="-78"/>
               </a:rPr>
               <a:t>جُمْلَةٌ: مَا اقْتِرَاحُكِ؟</a:t>
@@ -22477,6 +22612,7 @@
                   <a:srgbClr val="D4AF37"/>
                 </a:solidFill>
                 <a:latin typeface="Amiri" pitchFamily="2" charset="-78"/>
+                <a:ea typeface="Amiri" pitchFamily="2" charset="-78"/>
                 <a:cs typeface="Amiri" pitchFamily="2" charset="-78"/>
               </a:rPr>
               <a:t>م</a:t>
@@ -22797,6 +22933,7 @@
                   <a:srgbClr val="8A6D1E"/>
                 </a:solidFill>
                 <a:latin typeface="Amiri" pitchFamily="2" charset="-78"/>
+                <a:ea typeface="Amiri" pitchFamily="2" charset="-78"/>
                 <a:cs typeface="Amiri" pitchFamily="2" charset="-78"/>
               </a:rPr>
               <a:t>مُؤْتَمَرُ نَمُوذَجِ الأُمَمِ المُتَّحِدَةِ</a:t>
@@ -23272,6 +23409,7 @@
                   <a:srgbClr val="1B3B6F"/>
                 </a:solidFill>
                 <a:latin typeface="Amiri" pitchFamily="2" charset="-78"/>
+                <a:ea typeface="Amiri" pitchFamily="2" charset="-78"/>
                 <a:cs typeface="Amiri" pitchFamily="2" charset="-78"/>
               </a:rPr>
               <a:t>عُدْتُ مِنْ مُؤْتَمَرِ …</a:t>
@@ -23348,6 +23486,7 @@
                   <a:srgbClr val="1B3B6F"/>
                 </a:solidFill>
                 <a:latin typeface="Amiri" pitchFamily="2" charset="-78"/>
+                <a:ea typeface="Amiri" pitchFamily="2" charset="-78"/>
                 <a:cs typeface="Amiri" pitchFamily="2" charset="-78"/>
               </a:rPr>
               <a:t>مَثَّلْتُ … وَتَكَلَّمْتُ عَنْ …</a:t>
@@ -23424,6 +23563,7 @@
                   <a:srgbClr val="1B3B6F"/>
                 </a:solidFill>
                 <a:latin typeface="Amiri" pitchFamily="2" charset="-78"/>
+                <a:ea typeface="Amiri" pitchFamily="2" charset="-78"/>
                 <a:cs typeface="Amiri" pitchFamily="2" charset="-78"/>
               </a:rPr>
               <a:t>نُوقِشَتْ قَضَايَا كَثِيرَةٌ، وَقُبِلَ …</a:t>
@@ -23500,6 +23640,7 @@
                   <a:srgbClr val="1B3B6F"/>
                 </a:solidFill>
                 <a:latin typeface="Amiri" pitchFamily="2" charset="-78"/>
+                <a:ea typeface="Amiri" pitchFamily="2" charset="-78"/>
                 <a:cs typeface="Amiri" pitchFamily="2" charset="-78"/>
               </a:rPr>
               <a:t>إِذَا نَجَحْتُ … فَسَأُشَارِكُ …</a:t>
@@ -23671,6 +23812,7 @@
                   <a:srgbClr val="D4AF37"/>
                 </a:solidFill>
                 <a:latin typeface="Amiri" pitchFamily="2" charset="-78"/>
+                <a:ea typeface="Amiri" pitchFamily="2" charset="-78"/>
                 <a:cs typeface="Amiri" pitchFamily="2" charset="-78"/>
               </a:rPr>
               <a:t>م</a:t>
@@ -23991,6 +24133,7 @@
                   <a:srgbClr val="8A6D1E"/>
                 </a:solidFill>
                 <a:latin typeface="Amiri" pitchFamily="2" charset="-78"/>
+                <a:ea typeface="Amiri" pitchFamily="2" charset="-78"/>
                 <a:cs typeface="Amiri" pitchFamily="2" charset="-78"/>
               </a:rPr>
               <a:t>نَصُّ السُّؤَالِ</a:t>
@@ -24271,6 +24414,7 @@
                   <a:srgbClr val="1B3B6F"/>
                 </a:solidFill>
                 <a:latin typeface="Amiri" pitchFamily="2" charset="-78"/>
+                <a:ea typeface="Amiri" pitchFamily="2" charset="-78"/>
                 <a:cs typeface="Amiri" pitchFamily="2" charset="-78"/>
               </a:rPr>
               <a:t>اكْتُبِي رِسَالَةً إِلَى صَدِيقَتِكِ عَنْ مُؤْتَمَرِ نَمُوذَجِ الأُمَمِ المُتَّحِدَةِ (٨٠–٩٠ كَلِمَةً).</a:t>
@@ -24412,6 +24556,7 @@
                   <a:srgbClr val="1B3B6F"/>
                 </a:solidFill>
                 <a:latin typeface="Amiri" pitchFamily="2" charset="-78"/>
+                <a:ea typeface="Amiri" pitchFamily="2" charset="-78"/>
                 <a:cs typeface="Amiri" pitchFamily="2" charset="-78"/>
               </a:rPr>
               <a:t>أَيْنَ كَانَ المُؤْتَمَرُ؟ وَمَنْ شَارَكَ فِيهِ؟</a:t>
@@ -24553,6 +24698,7 @@
                   <a:srgbClr val="1B3B6F"/>
                 </a:solidFill>
                 <a:latin typeface="Amiri" pitchFamily="2" charset="-78"/>
+                <a:ea typeface="Amiri" pitchFamily="2" charset="-78"/>
                 <a:cs typeface="Amiri" pitchFamily="2" charset="-78"/>
               </a:rPr>
               <a:t>أَيَّ بَلَدٍ مَثَّلْتِ؟ وَعَنْ أَيِّ مَوْضُوعٍ تَكَلَّمْتِ؟</a:t>
@@ -24694,6 +24840,7 @@
                   <a:srgbClr val="1B3B6F"/>
                 </a:solidFill>
                 <a:latin typeface="Amiri" pitchFamily="2" charset="-78"/>
+                <a:ea typeface="Amiri" pitchFamily="2" charset="-78"/>
                 <a:cs typeface="Amiri" pitchFamily="2" charset="-78"/>
               </a:rPr>
               <a:t>مَاذَا نُوقِشَ أَوْ قُرِّرَ؟</a:t>
@@ -24835,6 +24982,7 @@
                   <a:srgbClr val="1B3B6F"/>
                 </a:solidFill>
                 <a:latin typeface="Amiri" pitchFamily="2" charset="-78"/>
+                <a:ea typeface="Amiri" pitchFamily="2" charset="-78"/>
                 <a:cs typeface="Amiri" pitchFamily="2" charset="-78"/>
               </a:rPr>
               <a:t>مَا رَأْيُكِ؟ وَمَا خِطَطُكِ؟ وَاسْأَلِي صَدِيقَتَكِ سُؤَالًا.</a:t>
@@ -25044,6 +25192,7 @@
                   <a:srgbClr val="D4AF37"/>
                 </a:solidFill>
                 <a:latin typeface="Amiri" pitchFamily="2" charset="-78"/>
+                <a:ea typeface="Amiri" pitchFamily="2" charset="-78"/>
                 <a:cs typeface="Amiri" pitchFamily="2" charset="-78"/>
               </a:rPr>
               <a:t>م</a:t>
@@ -25364,6 +25513,7 @@
                   <a:srgbClr val="8A6D1E"/>
                 </a:solidFill>
                 <a:latin typeface="Amiri" pitchFamily="2" charset="-78"/>
+                <a:ea typeface="Amiri" pitchFamily="2" charset="-78"/>
                 <a:cs typeface="Amiri" pitchFamily="2" charset="-78"/>
               </a:rPr>
               <a:t>قَوَالِبُ الكِتَابَةِ</a:t>
@@ -25644,6 +25794,7 @@
                   <a:srgbClr val="1B3B6F"/>
                 </a:solidFill>
                 <a:latin typeface="Amiri" pitchFamily="2" charset="-78"/>
+                <a:ea typeface="Amiri" pitchFamily="2" charset="-78"/>
                 <a:cs typeface="Amiri" pitchFamily="2" charset="-78"/>
               </a:rPr>
               <a:t>مَرْحَبًا يَا ______ ، كَيْفَ حَالُكِ؟</a:t>
@@ -25850,6 +26001,7 @@
                   <a:srgbClr val="1B3B6F"/>
                 </a:solidFill>
                 <a:latin typeface="Amiri" pitchFamily="2" charset="-78"/>
+                <a:ea typeface="Amiri" pitchFamily="2" charset="-78"/>
                 <a:cs typeface="Amiri" pitchFamily="2" charset="-78"/>
               </a:rPr>
               <a:t>عُدْتُ مِنْ مُؤْتَمَرِ ______ فِي ______ ، وَكَانَ فِيهِ ______ .</a:t>
@@ -26056,6 +26208,7 @@
                   <a:srgbClr val="1B3B6F"/>
                 </a:solidFill>
                 <a:latin typeface="Amiri" pitchFamily="2" charset="-78"/>
+                <a:ea typeface="Amiri" pitchFamily="2" charset="-78"/>
                 <a:cs typeface="Amiri" pitchFamily="2" charset="-78"/>
               </a:rPr>
               <a:t>مَثَّلْتُ ______ ، وَتَكَلَّمْتُ عَنْ ______ .</a:t>
@@ -26262,6 +26415,7 @@
                   <a:srgbClr val="1B3B6F"/>
                 </a:solidFill>
                 <a:latin typeface="Amiri" pitchFamily="2" charset="-78"/>
+                <a:ea typeface="Amiri" pitchFamily="2" charset="-78"/>
                 <a:cs typeface="Amiri" pitchFamily="2" charset="-78"/>
               </a:rPr>
               <a:t>نُوقِشَتْ ______ ، وَقُبِلَ ______ .</a:t>
@@ -26468,6 +26622,7 @@
                   <a:srgbClr val="1B3B6F"/>
                 </a:solidFill>
                 <a:latin typeface="Amiri" pitchFamily="2" charset="-78"/>
+                <a:ea typeface="Amiri" pitchFamily="2" charset="-78"/>
                 <a:cs typeface="Amiri" pitchFamily="2" charset="-78"/>
               </a:rPr>
               <a:t>أَظُنُّ أَنَّ ______ . إِذَا ______ ، فَسَأُشَارِكُ ______ .</a:t>
@@ -26674,6 +26829,7 @@
                   <a:srgbClr val="1B3B6F"/>
                 </a:solidFill>
                 <a:latin typeface="Amiri" pitchFamily="2" charset="-78"/>
+                <a:ea typeface="Amiri" pitchFamily="2" charset="-78"/>
                 <a:cs typeface="Amiri" pitchFamily="2" charset="-78"/>
               </a:rPr>
               <a:t>وَأَنْتِ، ______ ؟ مَعَ السَّلَامَةِ.</a:t>
@@ -26913,13 +27069,9 @@
     <a:fontScheme name="Office">
       <a:majorFont>
         <a:latin typeface="Calibri Light" panose="020F0302020204030204"/>
-        <a:ea typeface=""/>
-        <a:cs typeface=""/>
-        <a:font script="Jpan" typeface="游ゴシック Light"/>
-        <a:font script="Hang" typeface="맑은 고딕"/>
-        <a:font script="Hans" typeface="等线 Light"/>
-        <a:font script="Hant" typeface="新細明體"/>
-        <a:font script="Arab" typeface="Times New Roman"/>
+        <a:ea typeface="Amiri" pitchFamily="2" charset="-78"/>
+        <a:cs typeface="Amiri" pitchFamily="2" charset="-78"/>
+        <a:font script="Arab" typeface="Amiri"/>
         <a:font script="Hebr" typeface="Times New Roman"/>
         <a:font script="Thai" typeface="Angsana New"/>
         <a:font script="Ethi" typeface="Nyala"/>
@@ -26965,13 +27117,9 @@
       </a:majorFont>
       <a:minorFont>
         <a:latin typeface="Calibri" panose="020F0502020204030204"/>
-        <a:ea typeface=""/>
-        <a:cs typeface=""/>
-        <a:font script="Jpan" typeface="游ゴシック"/>
-        <a:font script="Hang" typeface="맑은 고딕"/>
-        <a:font script="Hans" typeface="等线"/>
-        <a:font script="Hant" typeface="新細明體"/>
-        <a:font script="Arab" typeface="Arial"/>
+        <a:ea typeface="Amiri" pitchFamily="2" charset="-78"/>
+        <a:cs typeface="Amiri" pitchFamily="2" charset="-78"/>
+        <a:font script="Arab" typeface="Amiri"/>
         <a:font script="Hebr" typeface="Arial"/>
         <a:font script="Thai" typeface="Cordia New"/>
         <a:font script="Ethi" typeface="Nyala"/>

--- a/Topic_E/Exam_Practice/TE-L10_Writing_Workshop_International_Life_and_Global_Connections.pptx
+++ b/Topic_E/Exam_Practice/TE-L10_Writing_Workshop_International_Life_and_Global_Connections.pptx
@@ -3852,7 +3852,7 @@
                 <a:solidFill>
                   <a:srgbClr val="FFFFFF"/>
                 </a:solidFill>
-                <a:latin typeface="Calibri" pitchFamily="34" charset="0"/>
+                <a:latin typeface="Amiri" pitchFamily="2" charset="-78"/>
                 <a:ea typeface="Amiri" pitchFamily="2" charset="-78"/>
                 <a:cs typeface="Amiri" pitchFamily="2" charset="-78"/>
               </a:rPr>
@@ -3918,7 +3918,7 @@
                 <a:solidFill>
                   <a:srgbClr val="FFFFFF"/>
                 </a:solidFill>
-                <a:latin typeface="Calibri" pitchFamily="34" charset="0"/>
+                <a:latin typeface="Amiri" pitchFamily="2" charset="-78"/>
                 <a:ea typeface="Amiri" pitchFamily="2" charset="-78"/>
                 <a:cs typeface="Amiri" pitchFamily="2" charset="-78"/>
               </a:rPr>
@@ -3984,7 +3984,7 @@
                 <a:solidFill>
                   <a:srgbClr val="FFFFFF"/>
                 </a:solidFill>
-                <a:latin typeface="Calibri" pitchFamily="34" charset="0"/>
+                <a:latin typeface="Amiri" pitchFamily="2" charset="-78"/>
                 <a:ea typeface="Amiri" pitchFamily="2" charset="-78"/>
                 <a:cs typeface="Amiri" pitchFamily="2" charset="-78"/>
               </a:rPr>
@@ -4050,7 +4050,7 @@
                 <a:solidFill>
                   <a:srgbClr val="FFFFFF"/>
                 </a:solidFill>
-                <a:latin typeface="Calibri" pitchFamily="34" charset="0"/>
+                <a:latin typeface="Amiri" pitchFamily="2" charset="-78"/>
                 <a:ea typeface="Amiri" pitchFamily="2" charset="-78"/>
                 <a:cs typeface="Amiri" pitchFamily="2" charset="-78"/>
               </a:rPr>
@@ -4848,7 +4848,7 @@
                 <a:solidFill>
                   <a:srgbClr val="FFFFFF"/>
                 </a:solidFill>
-                <a:latin typeface="Calibri" pitchFamily="34" charset="0"/>
+                <a:latin typeface="Amiri" pitchFamily="2" charset="-78"/>
                 <a:ea typeface="Amiri" pitchFamily="2" charset="-78"/>
                 <a:cs typeface="Amiri" pitchFamily="2" charset="-78"/>
               </a:rPr>
@@ -4914,7 +4914,7 @@
                 <a:solidFill>
                   <a:srgbClr val="FFFFFF"/>
                 </a:solidFill>
-                <a:latin typeface="Calibri" pitchFamily="34" charset="0"/>
+                <a:latin typeface="Amiri" pitchFamily="2" charset="-78"/>
                 <a:ea typeface="Amiri" pitchFamily="2" charset="-78"/>
                 <a:cs typeface="Amiri" pitchFamily="2" charset="-78"/>
               </a:rPr>
@@ -4980,7 +4980,7 @@
                 <a:solidFill>
                   <a:srgbClr val="FFFFFF"/>
                 </a:solidFill>
-                <a:latin typeface="Calibri" pitchFamily="34" charset="0"/>
+                <a:latin typeface="Amiri" pitchFamily="2" charset="-78"/>
                 <a:ea typeface="Amiri" pitchFamily="2" charset="-78"/>
                 <a:cs typeface="Amiri" pitchFamily="2" charset="-78"/>
               </a:rPr>
@@ -5046,7 +5046,7 @@
                 <a:solidFill>
                   <a:srgbClr val="FFFFFF"/>
                 </a:solidFill>
-                <a:latin typeface="Calibri" pitchFamily="34" charset="0"/>
+                <a:latin typeface="Amiri" pitchFamily="2" charset="-78"/>
                 <a:ea typeface="Amiri" pitchFamily="2" charset="-78"/>
                 <a:cs typeface="Amiri" pitchFamily="2" charset="-78"/>
               </a:rPr>
@@ -8603,7 +8603,7 @@
                 <a:solidFill>
                   <a:srgbClr val="FFFFFF"/>
                 </a:solidFill>
-                <a:latin typeface="Calibri" pitchFamily="34" charset="0"/>
+                <a:latin typeface="Amiri" pitchFamily="2" charset="-78"/>
                 <a:ea typeface="Amiri" pitchFamily="2" charset="-78"/>
                 <a:cs typeface="Amiri" pitchFamily="2" charset="-78"/>
               </a:rPr>
@@ -8669,7 +8669,7 @@
                 <a:solidFill>
                   <a:srgbClr val="FFFFFF"/>
                 </a:solidFill>
-                <a:latin typeface="Calibri" pitchFamily="34" charset="0"/>
+                <a:latin typeface="Amiri" pitchFamily="2" charset="-78"/>
                 <a:ea typeface="Amiri" pitchFamily="2" charset="-78"/>
                 <a:cs typeface="Amiri" pitchFamily="2" charset="-78"/>
               </a:rPr>
@@ -8735,7 +8735,7 @@
                 <a:solidFill>
                   <a:srgbClr val="FFFFFF"/>
                 </a:solidFill>
-                <a:latin typeface="Calibri" pitchFamily="34" charset="0"/>
+                <a:latin typeface="Amiri" pitchFamily="2" charset="-78"/>
                 <a:ea typeface="Amiri" pitchFamily="2" charset="-78"/>
                 <a:cs typeface="Amiri" pitchFamily="2" charset="-78"/>
               </a:rPr>
@@ -8801,7 +8801,7 @@
                 <a:solidFill>
                   <a:srgbClr val="FFFFFF"/>
                 </a:solidFill>
-                <a:latin typeface="Calibri" pitchFamily="34" charset="0"/>
+                <a:latin typeface="Amiri" pitchFamily="2" charset="-78"/>
                 <a:ea typeface="Amiri" pitchFamily="2" charset="-78"/>
                 <a:cs typeface="Amiri" pitchFamily="2" charset="-78"/>
               </a:rPr>
@@ -9588,7 +9588,7 @@
                 <a:solidFill>
                   <a:srgbClr val="FFFFFF"/>
                 </a:solidFill>
-                <a:latin typeface="Calibri" pitchFamily="34" charset="0"/>
+                <a:latin typeface="Amiri" pitchFamily="2" charset="-78"/>
                 <a:ea typeface="Amiri" pitchFamily="2" charset="-78"/>
                 <a:cs typeface="Amiri" pitchFamily="2" charset="-78"/>
               </a:rPr>
@@ -9654,7 +9654,7 @@
                 <a:solidFill>
                   <a:srgbClr val="FFFFFF"/>
                 </a:solidFill>
-                <a:latin typeface="Calibri" pitchFamily="34" charset="0"/>
+                <a:latin typeface="Amiri" pitchFamily="2" charset="-78"/>
                 <a:ea typeface="Amiri" pitchFamily="2" charset="-78"/>
                 <a:cs typeface="Amiri" pitchFamily="2" charset="-78"/>
               </a:rPr>
@@ -9720,7 +9720,7 @@
                 <a:solidFill>
                   <a:srgbClr val="FFFFFF"/>
                 </a:solidFill>
-                <a:latin typeface="Calibri" pitchFamily="34" charset="0"/>
+                <a:latin typeface="Amiri" pitchFamily="2" charset="-78"/>
                 <a:ea typeface="Amiri" pitchFamily="2" charset="-78"/>
                 <a:cs typeface="Amiri" pitchFamily="2" charset="-78"/>
               </a:rPr>
@@ -9786,7 +9786,7 @@
                 <a:solidFill>
                   <a:srgbClr val="FFFFFF"/>
                 </a:solidFill>
-                <a:latin typeface="Calibri" pitchFamily="34" charset="0"/>
+                <a:latin typeface="Amiri" pitchFamily="2" charset="-78"/>
                 <a:ea typeface="Amiri" pitchFamily="2" charset="-78"/>
                 <a:cs typeface="Amiri" pitchFamily="2" charset="-78"/>
               </a:rPr>
@@ -10573,7 +10573,7 @@
                 <a:solidFill>
                   <a:srgbClr val="FFFFFF"/>
                 </a:solidFill>
-                <a:latin typeface="Calibri" pitchFamily="34" charset="0"/>
+                <a:latin typeface="Amiri" pitchFamily="2" charset="-78"/>
                 <a:ea typeface="Amiri" pitchFamily="2" charset="-78"/>
                 <a:cs typeface="Amiri" pitchFamily="2" charset="-78"/>
               </a:rPr>
@@ -10639,7 +10639,7 @@
                 <a:solidFill>
                   <a:srgbClr val="FFFFFF"/>
                 </a:solidFill>
-                <a:latin typeface="Calibri" pitchFamily="34" charset="0"/>
+                <a:latin typeface="Amiri" pitchFamily="2" charset="-78"/>
                 <a:ea typeface="Amiri" pitchFamily="2" charset="-78"/>
                 <a:cs typeface="Amiri" pitchFamily="2" charset="-78"/>
               </a:rPr>
@@ -10705,7 +10705,7 @@
                 <a:solidFill>
                   <a:srgbClr val="FFFFFF"/>
                 </a:solidFill>
-                <a:latin typeface="Calibri" pitchFamily="34" charset="0"/>
+                <a:latin typeface="Amiri" pitchFamily="2" charset="-78"/>
                 <a:ea typeface="Amiri" pitchFamily="2" charset="-78"/>
                 <a:cs typeface="Amiri" pitchFamily="2" charset="-78"/>
               </a:rPr>
@@ -10771,7 +10771,7 @@
                 <a:solidFill>
                   <a:srgbClr val="FFFFFF"/>
                 </a:solidFill>
-                <a:latin typeface="Calibri" pitchFamily="34" charset="0"/>
+                <a:latin typeface="Amiri" pitchFamily="2" charset="-78"/>
                 <a:ea typeface="Amiri" pitchFamily="2" charset="-78"/>
                 <a:cs typeface="Amiri" pitchFamily="2" charset="-78"/>
               </a:rPr>
